--- a/decks/hist-holocaust/hist-holocaust_ch2_life-before.pptx
+++ b/decks/hist-holocaust/hist-holocaust_ch2_life-before.pptx
@@ -128,31 +128,31 @@
   <p:extLst>
     <p:ext uri="{521415D9-36F7-43E2-AB2F-B90AF26B5E84}">
       <p14:sectionLst xmlns:p14="http://schemas.microsoft.com/office/powerpoint/2010/main">
-        <p14:section name="Opening" id="{5ff6e279-4b93-62ac-3cfd-8bfa6941568d}">
+        <p14:section name="Opening" id="{30816967-1d78-4cfa-39fd-03219d2524bf}">
           <p14:sldIdLst>
             <p14:sldId id="256"/>
           </p14:sldIdLst>
         </p14:section>
-        <p14:section name="Gate" id="{0b4e15ac-2e56-0d01-c9a9-22892f9b18bb}">
+        <p14:section name="Gate" id="{e96407a3-094f-04eb-51f5-615664c515c0}">
           <p14:sldIdLst>
             <p14:sldId id="257"/>
             <p14:sldId id="258"/>
             <p14:sldId id="259"/>
           </p14:sldIdLst>
         </p14:section>
-        <p14:section name="Pre-teach" id="{89f7b4ef-90e4-f7f4-9c21-01329d2c5baa}">
+        <p14:section name="Pre-teach" id="{ade1a64a-59a8-ada1-181b-af3ac0dff31e}">
           <p14:sldIdLst>
             <p14:sldId id="260"/>
             <p14:sldId id="261"/>
           </p14:sldIdLst>
         </p14:section>
-        <p14:section name="Read-along" id="{5344fd39-2da5-855b-a3c6-08a0b1e1b505}">
+        <p14:section name="Read-along" id="{c27a16a4-66ac-c54f-1f75-ae8a06bca3da}">
           <p14:sldIdLst>
             <p14:sldId id="262"/>
             <p14:sldId id="263"/>
           </p14:sldIdLst>
         </p14:section>
-        <p14:section name="Teach" id="{9a361255-95a1-e786-1cbc-d34ffe8bb8dc}">
+        <p14:section name="Teach" id="{28a5e98a-35f8-63e1-f135-4fcc9b7350e0}">
           <p14:sldIdLst>
             <p14:sldId id="264"/>
             <p14:sldId id="265"/>
@@ -161,7 +161,7 @@
             <p14:sldId id="268"/>
           </p14:sldIdLst>
         </p14:section>
-        <p14:section name="Routes" id="{ec229f5e-3fa1-3007-013e-dc10005fb75d}">
+        <p14:section name="Routes" id="{fc8f22b8-3f87-0fef-f7ab-4d4199f60665}">
           <p14:sldIdLst>
             <p14:sldId id="269"/>
             <p14:sldId id="270"/>
@@ -169,12 +169,12 @@
             <p14:sldId id="272"/>
           </p14:sldIdLst>
         </p14:section>
-        <p14:section name="Close" id="{75e6abee-a65b-e33e-0314-6269a120d89e}">
+        <p14:section name="Close" id="{b8befa2c-32fb-c03d-3ea0-db6985d53f76}">
           <p14:sldIdLst>
             <p14:sldId id="273"/>
           </p14:sldIdLst>
         </p14:section>
-        <p14:section name="Answers" id="{0dc36529-0df7-926b-fd92-a32028eef69d}">
+        <p14:section name="Answers" id="{a0c72067-34cb-aa5a-5d1a-2da3039ab7c9}">
           <p14:sldIdLst>
             <p14:sldId id="274"/>
             <p14:sldId id="275"/>
